--- a/classes/parte-1-machine-learning-clasico/091-maldicion-de-la-dimensionalidad/clase-091-maldicion-de-la-dimensionalidad-presentacion.pptx
+++ b/classes/parte-1-machine-learning-clasico/091-maldicion-de-la-dimensionalidad/clase-091-maldicion-de-la-dimensionalidad-presentacion.pptx
@@ -4955,7 +4955,7 @@
                 </a:solidFill>
                 <a:latin typeface="Segoe UI"/>
               </a:rPr>
-              <a:t>Primer bloque ejecutable del notebook.</a:t>
+              <a:t>En [0,1]^d, la fracción de volumen a menos de 0.01 del borde es 1 - 0.98^d. Crece rápido: casi todo el volumen vive pegado al borde.</a:t>
             </a:r>
           </a:p>
         </p:txBody>
@@ -5042,7 +5042,311 @@
                 </a:solidFill>
                 <a:latin typeface="Courier New"/>
               </a:rPr>
-              <a:t># Imports y configuración inicial</a:t>
+              <a:t>import numpy as np</a:t>
+            </a:r>
+          </a:p>
+          <a:p>
+            <a:pPr>
+              <a:defRPr sz="1200" b="0">
+                <a:solidFill>
+                  <a:srgbClr val="F8FAFC"/>
+                </a:solidFill>
+                <a:latin typeface="Courier New"/>
+              </a:defRPr>
+            </a:pPr>
+            <a:r>
+              <a:rPr sz="1200" b="0">
+                <a:solidFill>
+                  <a:srgbClr val="F8FAFC"/>
+                </a:solidFill>
+                <a:latin typeface="Courier New"/>
+              </a:rPr>
+              <a:t>import matplotlib.pyplot as plt</a:t>
+            </a:r>
+          </a:p>
+          <a:p>
+            <a:pPr>
+              <a:defRPr sz="1200" b="0">
+                <a:solidFill>
+                  <a:srgbClr val="F8FAFC"/>
+                </a:solidFill>
+                <a:latin typeface="Courier New"/>
+              </a:defRPr>
+            </a:pPr>
+            <a:r>
+              <a:rPr sz="1200" b="0">
+                <a:solidFill>
+                  <a:srgbClr val="F8FAFC"/>
+                </a:solidFill>
+                <a:latin typeface="Courier New"/>
+              </a:rPr>
+              <a:t> </a:t>
+            </a:r>
+          </a:p>
+          <a:p>
+            <a:pPr>
+              <a:defRPr sz="1200" b="0">
+                <a:solidFill>
+                  <a:srgbClr val="F8FAFC"/>
+                </a:solidFill>
+                <a:latin typeface="Courier New"/>
+              </a:defRPr>
+            </a:pPr>
+            <a:r>
+              <a:rPr sz="1200" b="0">
+                <a:solidFill>
+                  <a:srgbClr val="F8FAFC"/>
+                </a:solidFill>
+                <a:latin typeface="Courier New"/>
+              </a:rPr>
+              <a:t>rng = np.random.default_rng(42)</a:t>
+            </a:r>
+          </a:p>
+          <a:p>
+            <a:pPr>
+              <a:defRPr sz="1200" b="0">
+                <a:solidFill>
+                  <a:srgbClr val="F8FAFC"/>
+                </a:solidFill>
+                <a:latin typeface="Courier New"/>
+              </a:defRPr>
+            </a:pPr>
+            <a:r>
+              <a:rPr sz="1200" b="0">
+                <a:solidFill>
+                  <a:srgbClr val="F8FAFC"/>
+                </a:solidFill>
+                <a:latin typeface="Courier New"/>
+              </a:rPr>
+              <a:t> </a:t>
+            </a:r>
+          </a:p>
+          <a:p>
+            <a:pPr>
+              <a:defRPr sz="1200" b="0">
+                <a:solidFill>
+                  <a:srgbClr val="F8FAFC"/>
+                </a:solidFill>
+                <a:latin typeface="Courier New"/>
+              </a:defRPr>
+            </a:pPr>
+            <a:r>
+              <a:rPr sz="1200" b="0">
+                <a:solidFill>
+                  <a:srgbClr val="F8FAFC"/>
+                </a:solidFill>
+                <a:latin typeface="Courier New"/>
+              </a:rPr>
+              <a:t>dims = np.arange(1, 201)</a:t>
+            </a:r>
+          </a:p>
+          <a:p>
+            <a:pPr>
+              <a:defRPr sz="1200" b="0">
+                <a:solidFill>
+                  <a:srgbClr val="F8FAFC"/>
+                </a:solidFill>
+                <a:latin typeface="Courier New"/>
+              </a:defRPr>
+            </a:pPr>
+            <a:r>
+              <a:rPr sz="1200" b="0">
+                <a:solidFill>
+                  <a:srgbClr val="F8FAFC"/>
+                </a:solidFill>
+                <a:latin typeface="Courier New"/>
+              </a:rPr>
+              <a:t>frac_borde = 1 - 0.98 ** dims</a:t>
+            </a:r>
+          </a:p>
+          <a:p>
+            <a:pPr>
+              <a:defRPr sz="1200" b="0">
+                <a:solidFill>
+                  <a:srgbClr val="F8FAFC"/>
+                </a:solidFill>
+                <a:latin typeface="Courier New"/>
+              </a:defRPr>
+            </a:pPr>
+            <a:r>
+              <a:rPr sz="1200" b="0">
+                <a:solidFill>
+                  <a:srgbClr val="F8FAFC"/>
+                </a:solidFill>
+                <a:latin typeface="Courier New"/>
+              </a:rPr>
+              <a:t>for d in (2, 10, 100):</a:t>
+            </a:r>
+          </a:p>
+          <a:p>
+            <a:pPr>
+              <a:defRPr sz="1200" b="0">
+                <a:solidFill>
+                  <a:srgbClr val="F8FAFC"/>
+                </a:solidFill>
+                <a:latin typeface="Courier New"/>
+              </a:defRPr>
+            </a:pPr>
+            <a:r>
+              <a:rPr sz="1200" b="0">
+                <a:solidFill>
+                  <a:srgbClr val="F8FAFC"/>
+                </a:solidFill>
+                <a:latin typeface="Courier New"/>
+              </a:rPr>
+              <a:t>    print(f"d={d:&gt;3}: fraccion cerca del borde = {1 - 0.98**d:.4f}")</a:t>
+            </a:r>
+          </a:p>
+          <a:p>
+            <a:pPr>
+              <a:defRPr sz="1200" b="0">
+                <a:solidFill>
+                  <a:srgbClr val="F8FAFC"/>
+                </a:solidFill>
+                <a:latin typeface="Courier New"/>
+              </a:defRPr>
+            </a:pPr>
+            <a:r>
+              <a:rPr sz="1200" b="0">
+                <a:solidFill>
+                  <a:srgbClr val="F8FAFC"/>
+                </a:solidFill>
+                <a:latin typeface="Courier New"/>
+              </a:rPr>
+              <a:t>assert frac_borde[99] &gt; 0.85, "en d=100 casi todo el volumen esta en el borde"</a:t>
+            </a:r>
+          </a:p>
+          <a:p>
+            <a:pPr>
+              <a:defRPr sz="1200" b="0">
+                <a:solidFill>
+                  <a:srgbClr val="F8FAFC"/>
+                </a:solidFill>
+                <a:latin typeface="Courier New"/>
+              </a:defRPr>
+            </a:pPr>
+            <a:r>
+              <a:rPr sz="1200" b="0">
+                <a:solidFill>
+                  <a:srgbClr val="F8FAFC"/>
+                </a:solidFill>
+                <a:latin typeface="Courier New"/>
+              </a:rPr>
+              <a:t> </a:t>
+            </a:r>
+          </a:p>
+          <a:p>
+            <a:pPr>
+              <a:defRPr sz="1200" b="0">
+                <a:solidFill>
+                  <a:srgbClr val="F8FAFC"/>
+                </a:solidFill>
+                <a:latin typeface="Courier New"/>
+              </a:defRPr>
+            </a:pPr>
+            <a:r>
+              <a:rPr sz="1200" b="0">
+                <a:solidFill>
+                  <a:srgbClr val="F8FAFC"/>
+                </a:solidFill>
+                <a:latin typeface="Courier New"/>
+              </a:rPr>
+              <a:t>plt.figure(figsize=(7, 4))</a:t>
+            </a:r>
+          </a:p>
+          <a:p>
+            <a:pPr>
+              <a:defRPr sz="1200" b="0">
+                <a:solidFill>
+                  <a:srgbClr val="F8FAFC"/>
+                </a:solidFill>
+                <a:latin typeface="Courier New"/>
+              </a:defRPr>
+            </a:pPr>
+            <a:r>
+              <a:rPr sz="1200" b="0">
+                <a:solidFill>
+                  <a:srgbClr val="F8FAFC"/>
+                </a:solidFill>
+                <a:latin typeface="Courier New"/>
+              </a:rPr>
+              <a:t>plt.plot(dims, frac_borde, color="#37a")</a:t>
+            </a:r>
+          </a:p>
+          <a:p>
+            <a:pPr>
+              <a:defRPr sz="1200" b="0">
+                <a:solidFill>
+                  <a:srgbClr val="F8FAFC"/>
+                </a:solidFill>
+                <a:latin typeface="Courier New"/>
+              </a:defRPr>
+            </a:pPr>
+            <a:r>
+              <a:rPr sz="1200" b="0">
+                <a:solidFill>
+                  <a:srgbClr val="F8FAFC"/>
+                </a:solidFill>
+                <a:latin typeface="Courier New"/>
+              </a:rPr>
+              <a:t>plt.axhline(0.99, ls="--", color="#c33", lw=0.8, label="99%")</a:t>
+            </a:r>
+          </a:p>
+          <a:p>
+            <a:pPr>
+              <a:defRPr sz="1200" b="0">
+                <a:solidFill>
+                  <a:srgbClr val="F8FAFC"/>
+                </a:solidFill>
+                <a:latin typeface="Courier New"/>
+              </a:defRPr>
+            </a:pPr>
+            <a:r>
+              <a:rPr sz="1200" b="0">
+                <a:solidFill>
+                  <a:srgbClr val="F8FAFC"/>
+                </a:solidFill>
+                <a:latin typeface="Courier New"/>
+              </a:rPr>
+              <a:t>plt.xlabel("dimension d"); plt.ylabel("fraccion cerca del borde")</a:t>
+            </a:r>
+          </a:p>
+          <a:p>
+            <a:pPr>
+              <a:defRPr sz="1200" b="0">
+                <a:solidFill>
+                  <a:srgbClr val="F8FAFC"/>
+                </a:solidFill>
+                <a:latin typeface="Courier New"/>
+              </a:defRPr>
+            </a:pPr>
+            <a:r>
+              <a:rPr sz="1200" b="0">
+                <a:solidFill>
+                  <a:srgbClr val="F8FAFC"/>
+                </a:solidFill>
+                <a:latin typeface="Courier New"/>
+              </a:rPr>
+              <a:t>plt.title("El volumen se concentra en el borde")</a:t>
+            </a:r>
+          </a:p>
+          <a:p>
+            <a:pPr>
+              <a:defRPr sz="1200" b="0">
+                <a:solidFill>
+                  <a:srgbClr val="F8FAFC"/>
+                </a:solidFill>
+                <a:latin typeface="Courier New"/>
+              </a:defRPr>
+            </a:pPr>
+            <a:r>
+              <a:rPr sz="1200" b="0">
+                <a:solidFill>
+                  <a:srgbClr val="F8FAFC"/>
+                </a:solidFill>
+                <a:latin typeface="Courier New"/>
+              </a:rPr>
+              <a:t>plt.legend(); plt.tight_layout(); plt.show()</a:t>
             </a:r>
           </a:p>
         </p:txBody>

--- a/classes/parte-1-machine-learning-clasico/091-maldicion-de-la-dimensionalidad/clase-091-maldicion-de-la-dimensionalidad-presentacion.pptx
+++ b/classes/parte-1-machine-learning-clasico/091-maldicion-de-la-dimensionalidad/clase-091-maldicion-de-la-dimensionalidad-presentacion.pptx
@@ -3272,7 +3272,7 @@
                 </a:solidFill>
                 <a:latin typeface="Segoe UI"/>
               </a:rPr>
-              <a:t>Parte: 1 — Machine Learning Clásico · Fuente: Géron, cap. 8 § The Curse of Dimensionality. · Duración estimada: 45 min.</a:t>
+              <a:t>Parte: 1 — Machine Learning Clásico · Fuente: Géron, cap. 8 § The Curse of Dimensionality. · Duración estimada: 45 min. · Nivel: Intermedio</a:t>
             </a:r>
           </a:p>
         </p:txBody>
@@ -3581,7 +3581,7 @@
                 </a:solidFill>
                 <a:latin typeface="Segoe UI"/>
               </a:rPr>
-              <a:t>Parte: 1 — Machine Learning Clásico · Fuente: Géron, cap. 8 § The Curse of Dimensionality. · Duración estimada: 45 min.</a:t>
+              <a:t>Parte: 1 — Machine Learning Clásico · Fuente: Géron, cap. 8 § The Curse of Dimensionality. · Duración estimada: 45 min. · Nivel: Intermedio</a:t>
             </a:r>
           </a:p>
         </p:txBody>
